--- a/qchem_progress_report.pptx
+++ b/qchem_progress_report.pptx
@@ -95,7 +95,7 @@
 </file>
 
 <file path=ppt/notesSlides/notesSlide10.xml><?xml version="1.0" encoding="utf-8"?>
-<p:notes xmlns:p="http://schemas.openxmlformats.org/presentationml/2006/main">
+<p:notes xmlns:a="http://schemas.openxmlformats.org/drawingml/2006/main" xmlns:p="http://schemas.openxmlformats.org/presentationml/2006/main">
   <p:cSld>
     <p:spTree>
       <p:nvGrpSpPr>
@@ -1922,7 +1922,7 @@
 </file>
 
 <file path=ppt/slideMasters/slideMaster1.xml><?xml version="1.0" encoding="utf-8"?>
-<p:sldMaster xmlns:p="http://schemas.openxmlformats.org/presentationml/2006/main">
+<p:sldMaster xmlns:r="http://schemas.openxmlformats.org/officeDocument/2006/relationships" xmlns:p="http://schemas.openxmlformats.org/presentationml/2006/main">
   <p:cSld>
     <p:spTree>
       <p:nvGrpSpPr>
@@ -2301,43 +2301,6 @@
       </p:sp>
       <p:sp>
         <p:nvSpPr>
-          <p:cNvPr id="10068" name="TextBox 3"/>
-          <p:cNvSpPr/>
-          <p:nvPr/>
-        </p:nvSpPr>
-        <p:spPr>
-          <a:xfrm xmlns:a="http://schemas.openxmlformats.org/drawingml/2006/main">
-            <a:off x="540000" y="2088000"/>
-            <a:ext cx="5040000" cy="792000"/>
-          </a:xfrm>
-          <a:prstGeom xmlns:a="http://schemas.openxmlformats.org/drawingml/2006/main" prst="rect">
-            <a:avLst/>
-          </a:prstGeom>
-          <a:noFill xmlns:a="http://schemas.openxmlformats.org/drawingml/2006/main"/>
-          <a:ln xmlns:a="http://schemas.openxmlformats.org/drawingml/2006/main">
-            <a:noFill/>
-          </a:ln>
-        </p:spPr>
-        <p:txBody>
-          <a:bodyPr xmlns:a="http://schemas.openxmlformats.org/drawingml/2006/main"/>
-          <a:lstStyle xmlns:a="http://schemas.openxmlformats.org/drawingml/2006/main"/>
-          <a:p xmlns:a="http://schemas.openxmlformats.org/drawingml/2006/main">
-            <a:pPr algn="l"/>
-            <a:r>
-              <a:rPr lang="en-US" sz="2000" b="0">
-                <a:solidFill>
-                  <a:srgbClr val="333333"/>
-                </a:solidFill>
-                <a:latin typeface="Calibri"/>
-                <a:ea typeface="Calibri"/>
-              </a:rPr>
-              <a:t>• Fermion to Qubit映射</a:t>
-            </a:r>
-          </a:p>
-        </p:txBody>
-      </p:sp>
-      <p:sp>
-        <p:nvSpPr>
           <p:cNvPr id="10069" name="TextBox 4"/>
           <p:cNvSpPr/>
           <p:nvPr/>
@@ -6710,7 +6673,7 @@
                 <a:latin typeface="Calibri"/>
                 <a:ea typeface="Calibri"/>
               </a:rPr>
-              <a:t>映射/Ansatz -&gt; 构建电路IR并编译</a:t>
+              <a:t>哈密顿量与 Ansatz → 电路 IR / 编译</a:t>
             </a:r>
           </a:p>
         </p:txBody>
